--- a/10-Ansible/10-Ansible-Fundamentals.pptx
+++ b/10-Ansible/10-Ansible-Fundamentals.pptx
@@ -10713,18 +10713,7 @@
                 <a:ea typeface="Arial" pitchFamily="34" charset="-122"/>
                 <a:cs typeface="Arial" pitchFamily="34" charset="-120"/>
               </a:rPr>
-              <a:t>Configure each service </a:t>
-            </a:r>
-            <a:r>
-              <a:rPr lang="en-US" sz="1300" dirty="0" err="1">
-                <a:solidFill>
-                  <a:srgbClr val="3A4668"/>
-                </a:solidFill>
-                <a:latin typeface="Arial" pitchFamily="34" charset="0"/>
-                <a:ea typeface="Arial" pitchFamily="34" charset="-122"/>
-                <a:cs typeface="Arial" pitchFamily="34" charset="-120"/>
-              </a:rPr>
-              <a:t>individuallya</a:t>
+              <a:t>Configure each service individually</a:t>
             </a:r>
             <a:endParaRPr lang="en-US" sz="1300" dirty="0"/>
           </a:p>
@@ -13748,7 +13737,7 @@
         <p:spPr>
           <a:xfrm>
             <a:off x="640080" y="1143000"/>
-            <a:ext cx="7863840" cy="3017520"/>
+            <a:ext cx="7863840" cy="3665220"/>
           </a:xfrm>
           <a:prstGeom prst="rect">
             <a:avLst/>
